--- a/praesentation/Lehrerzeit-Vorstellung.pptx
+++ b/praesentation/Lehrerzeit-Vorstellung.pptx
@@ -8040,7 +8040,7 @@
                 <a:ea typeface="Calibri" pitchFamily="34" charset="-122"/>
                 <a:cs typeface="Calibri" pitchFamily="34" charset="-120"/>
               </a:rPr>
-              <a:t>Pflichtstundenzahl, Ferientermine und die Stunden je Funktionsaufgabe sind Startwerte. Alles ist in der App änderbar, ohne Programmierkenntnisse.</a:t>
+              <a:t>Die Pflichtstunden und Ermäßigungen stammen aus der KMK-Übersicht von 2019, die Verordnung wurde seither neu gefasst. Alles ist in der App änderbar, ohne Programmierkenntnisse.</a:t>
             </a:r>
             <a:endParaRPr lang="en-US" sz="1350" dirty="0"/>
           </a:p>
